--- a/relazione/PRESENTAZIONE_v2.pptx
+++ b/relazione/PRESENTAZIONE_v2.pptx
@@ -5194,8 +5194,8 @@
         </p:blipFill>
         <p:spPr>
           <a:xfrm>
-            <a:off x="1139647" y="1463040"/>
-            <a:ext cx="9909657" cy="4389120"/>
+            <a:off x="1129039" y="1463040"/>
+            <a:ext cx="9930872" cy="4389120"/>
           </a:xfrm>
           <a:prstGeom prst="rect">
             <a:avLst/>
@@ -6520,7 +6520,7 @@
                 </a:solidFill>
                 <a:latin typeface="Segoe UI"/>
               </a:rPr>
-              <a:t>Soglia onesta, non oracle: </a:t>
+              <a:t>Calibrazione onesta (soglia + probabilita'): </a:t>
             </a:r>
             <a:r>
               <a:rPr sz="1500" b="0" i="0">
@@ -6529,7 +6529,7 @@
                 </a:solidFill>
                 <a:latin typeface="Segoe UI"/>
               </a:rPr>
-              <a:t>la best-F1 guarda le etichette del test; con cross-validation l'accuratezza dispiegabile e' 0.954 vs 0.968 oracle (gap +1.4pp): l'operating point e' stabile</a:t>
+              <a:t>best-F1 e' un oracle -&gt; accuratezza held-out 0.954 vs 0.968; lo score grezzo non e' una probabilita' (ECE 0.32) -&gt; calibrato Platt/isotonica ECE 0.03 (held-out)</a:t>
             </a:r>
           </a:p>
           <a:p>
@@ -10198,8 +10198,8 @@
         </p:blipFill>
         <p:spPr>
           <a:xfrm>
-            <a:off x="548640" y="2011113"/>
-            <a:ext cx="11091672" cy="3338692"/>
+            <a:off x="548640" y="2012048"/>
+            <a:ext cx="11091672" cy="3336822"/>
           </a:xfrm>
           <a:prstGeom prst="rect">
             <a:avLst/>

--- a/relazione/PRESENTAZIONE_v2.pptx
+++ b/relazione/PRESENTAZIONE_v2.pptx
@@ -24,6 +24,7 @@
     <p:sldId id="272" r:id="rId23"/>
     <p:sldId id="273" r:id="rId24"/>
     <p:sldId id="274" r:id="rId25"/>
+    <p:sldId id="275" r:id="rId26"/>
   </p:sldIdLst>
   <p:sldSz cx="12191695" cy="6858000" type="screen4x3"/>
   <p:notesSz cx="6858000" cy="9144000"/>
@@ -6975,7 +6976,7 @@
                 </a:solidFill>
                 <a:latin typeface="Segoe UI"/>
               </a:rPr>
-              <a:t>SCELTE DI EFFICIENZA</a:t>
+              <a:t>DEPLOYMENT · ROBUSTEZZA</a:t>
             </a:r>
           </a:p>
         </p:txBody>
@@ -7017,145 +7018,35 @@
                 </a:solidFill>
                 <a:latin typeface="Segoe UI"/>
               </a:rPr>
-              <a:t>Cosa NON abbiamo aggiunto — e perché</a:t>
-            </a:r>
-          </a:p>
-        </p:txBody>
-      </p:sp>
-      <p:sp>
-        <p:nvSpPr>
-          <p:cNvPr id="5" name="TextBox 4"/>
-          <p:cNvSpPr txBox="1"/>
+              <a:t>Tiene quando il sensore peggiora?</a:t>
+            </a:r>
+          </a:p>
+        </p:txBody>
+      </p:sp>
+      <p:pic>
+        <p:nvPicPr>
+          <p:cNvPr id="5" name="Picture 4" descr="fig_robustness.png"/>
+          <p:cNvPicPr>
+            <a:picLocks noChangeAspect="1"/>
+          </p:cNvPicPr>
           <p:nvPr/>
-        </p:nvSpPr>
-        <p:spPr>
-          <a:xfrm>
-            <a:off x="548640" y="1600200"/>
-            <a:ext cx="11091672" cy="2743200"/>
+        </p:nvPicPr>
+        <p:blipFill>
+          <a:blip r:embed="rId2"/>
+          <a:stretch>
+            <a:fillRect/>
+          </a:stretch>
+        </p:blipFill>
+        <p:spPr>
+          <a:xfrm>
+            <a:off x="2436876" y="1463040"/>
+            <a:ext cx="7315199" cy="4389120"/>
           </a:xfrm>
           <a:prstGeom prst="rect">
             <a:avLst/>
           </a:prstGeom>
-          <a:noFill/>
-        </p:spPr>
-        <p:txBody>
-          <a:bodyPr wrap="square">
-            <a:spAutoFit/>
-          </a:bodyPr>
-          <a:lstStyle/>
-          <a:p>
-            <a:pPr algn="l">
-              <a:spcBef>
-                <a:spcPts val="0"/>
-              </a:spcBef>
-              <a:spcAft>
-                <a:spcPts val="1200"/>
-              </a:spcAft>
-            </a:pPr>
-            <a:r>
-              <a:rPr sz="1500" b="1" i="0">
-                <a:solidFill>
-                  <a:srgbClr val="1F9D55"/>
-                </a:solidFill>
-                <a:latin typeface="Segoe UI"/>
-              </a:rPr>
-              <a:t>▪  </a:t>
-            </a:r>
-            <a:r>
-              <a:rPr sz="1550" b="1" i="0">
-                <a:solidFill>
-                  <a:srgbClr val="1C2128"/>
-                </a:solidFill>
-                <a:latin typeface="Segoe UI"/>
-              </a:rPr>
-              <a:t>Niente FAISS / ANN: </a:t>
-            </a:r>
-            <a:r>
-              <a:rPr sz="1550" b="0" i="0">
-                <a:solidFill>
-                  <a:srgbClr val="1C2128"/>
-                </a:solidFill>
-                <a:latin typeface="Segoe UI"/>
-              </a:rPr>
-              <a:t>a questa dimensione del bank la ricerca esatta del vicino costa secondi per categoria; un indice approssimato aggiungerebbe una dipendenza e un rischio di accuratezza per zero guadagno</a:t>
-            </a:r>
-          </a:p>
-          <a:p>
-            <a:pPr algn="l">
-              <a:spcBef>
-                <a:spcPts val="0"/>
-              </a:spcBef>
-              <a:spcAft>
-                <a:spcPts val="1200"/>
-              </a:spcAft>
-            </a:pPr>
-            <a:r>
-              <a:rPr sz="1500" b="1" i="0">
-                <a:solidFill>
-                  <a:srgbClr val="1F9D55"/>
-                </a:solidFill>
-                <a:latin typeface="Segoe UI"/>
-              </a:rPr>
-              <a:t>▪  </a:t>
-            </a:r>
-            <a:r>
-              <a:rPr sz="1550" b="1" i="0">
-                <a:solidFill>
-                  <a:srgbClr val="1C2128"/>
-                </a:solidFill>
-                <a:latin typeface="Segoe UI"/>
-              </a:rPr>
-              <a:t>Niente backbone piu' pesante: </a:t>
-            </a:r>
-            <a:r>
-              <a:rPr sz="1550" b="0" i="0">
-                <a:solidFill>
-                  <a:srgbClr val="1C2128"/>
-                </a:solidFill>
-                <a:latin typeface="Segoe UI"/>
-              </a:rPr>
-              <a:t>WideResNet50-2 congelata raggiunge gia' 0.9846 macro; l'intero sistema addestra e serve su una GPU da 4 GB</a:t>
-            </a:r>
-          </a:p>
-          <a:p>
-            <a:pPr algn="l">
-              <a:spcBef>
-                <a:spcPts val="0"/>
-              </a:spcBef>
-              <a:spcAft>
-                <a:spcPts val="1200"/>
-              </a:spcAft>
-            </a:pPr>
-            <a:r>
-              <a:rPr sz="1500" b="1" i="0">
-                <a:solidFill>
-                  <a:srgbClr val="1F9D55"/>
-                </a:solidFill>
-                <a:latin typeface="Segoe UI"/>
-              </a:rPr>
-              <a:t>▪  </a:t>
-            </a:r>
-            <a:r>
-              <a:rPr sz="1550" b="1" i="0">
-                <a:solidFill>
-                  <a:srgbClr val="1C2128"/>
-                </a:solidFill>
-                <a:latin typeface="Segoe UI"/>
-              </a:rPr>
-              <a:t>Ensemble GAN + PatchCore, misurato non assunto: </a:t>
-            </a:r>
-            <a:r>
-              <a:rPr sz="1550" b="0" i="0">
-                <a:solidFill>
-                  <a:srgbClr val="1C2128"/>
-                </a:solidFill>
-                <a:latin typeface="Segoe UI"/>
-              </a:rPr>
-              <a:t>peso di fusione scelto su fold di calibrazione e validato su fold held-out — nessun guadagno materiale sul macro AUROC: il PatchCore da solo domina, quindi spediamo il sistema piu' semplice</a:t>
-            </a:r>
-          </a:p>
-        </p:txBody>
-      </p:sp>
+        </p:spPr>
+      </p:pic>
       <p:sp>
         <p:nvSpPr>
           <p:cNvPr id="6" name="Rounded Rectangle 5"/>
@@ -7164,8 +7055,8 @@
         </p:nvSpPr>
         <p:spPr>
           <a:xfrm>
-            <a:off x="548640" y="4709160"/>
-            <a:ext cx="3520440" cy="1143000"/>
+            <a:off x="548640" y="6080760"/>
+            <a:ext cx="11091672" cy="566928"/>
           </a:xfrm>
           <a:prstGeom prst="roundRect">
             <a:avLst>
@@ -7195,249 +7086,6 @@
           </a:fontRef>
         </p:style>
         <p:txBody>
-          <a:bodyPr rtlCol="0" anchor="ctr" wrap="square" lIns="109728" rIns="109728"/>
-          <a:lstStyle/>
-          <a:p>
-            <a:pPr algn="ctr">
-              <a:spcBef>
-                <a:spcPts val="0"/>
-              </a:spcBef>
-              <a:spcAft>
-                <a:spcPts val="200"/>
-              </a:spcAft>
-            </a:pPr>
-            <a:r>
-              <a:rPr sz="3000" b="1" i="0">
-                <a:solidFill>
-                  <a:srgbClr val="1F9D55"/>
-                </a:solidFill>
-                <a:latin typeface="Segoe UI"/>
-              </a:rPr>
-              <a:t>4 GB</a:t>
-            </a:r>
-          </a:p>
-          <a:p>
-            <a:pPr algn="ctr">
-              <a:spcBef>
-                <a:spcPts val="0"/>
-              </a:spcBef>
-              <a:spcAft>
-                <a:spcPts val="0"/>
-              </a:spcAft>
-            </a:pPr>
-            <a:r>
-              <a:rPr sz="1150" b="0" i="0">
-                <a:solidFill>
-                  <a:srgbClr val="6B747E"/>
-                </a:solidFill>
-                <a:latin typeface="Segoe UI"/>
-              </a:rPr>
-              <a:t>tutta l'inferenza su Quadro T1000</a:t>
-            </a:r>
-          </a:p>
-        </p:txBody>
-      </p:sp>
-      <p:sp>
-        <p:nvSpPr>
-          <p:cNvPr id="7" name="Rounded Rectangle 6"/>
-          <p:cNvSpPr/>
-          <p:nvPr/>
-        </p:nvSpPr>
-        <p:spPr>
-          <a:xfrm>
-            <a:off x="4334256" y="4709160"/>
-            <a:ext cx="3520440" cy="1143000"/>
-          </a:xfrm>
-          <a:prstGeom prst="roundRect">
-            <a:avLst>
-              <a:gd name="adj" fmla="val 6000"/>
-            </a:avLst>
-          </a:prstGeom>
-          <a:solidFill>
-            <a:srgbClr val="F2F6F9"/>
-          </a:solidFill>
-          <a:ln>
-            <a:noFill/>
-          </a:ln>
-          <a:effectLst/>
-        </p:spPr>
-        <p:style>
-          <a:lnRef idx="1">
-            <a:schemeClr val="accent1"/>
-          </a:lnRef>
-          <a:fillRef idx="3">
-            <a:schemeClr val="accent1"/>
-          </a:fillRef>
-          <a:effectRef idx="2">
-            <a:schemeClr val="accent1"/>
-          </a:effectRef>
-          <a:fontRef idx="minor">
-            <a:schemeClr val="lt1"/>
-          </a:fontRef>
-        </p:style>
-        <p:txBody>
-          <a:bodyPr rtlCol="0" anchor="ctr" wrap="square" lIns="109728" rIns="109728"/>
-          <a:lstStyle/>
-          <a:p>
-            <a:pPr algn="ctr">
-              <a:spcBef>
-                <a:spcPts val="0"/>
-              </a:spcBef>
-              <a:spcAft>
-                <a:spcPts val="200"/>
-              </a:spcAft>
-            </a:pPr>
-            <a:r>
-              <a:rPr sz="3000" b="1" i="0">
-                <a:solidFill>
-                  <a:srgbClr val="1F9D55"/>
-                </a:solidFill>
-                <a:latin typeface="Segoe UI"/>
-              </a:rPr>
-              <a:t>~6 s</a:t>
-            </a:r>
-          </a:p>
-          <a:p>
-            <a:pPr algn="ctr">
-              <a:spcBef>
-                <a:spcPts val="0"/>
-              </a:spcBef>
-              <a:spcAft>
-                <a:spcPts val="0"/>
-              </a:spcAft>
-            </a:pPr>
-            <a:r>
-              <a:rPr sz="1150" b="0" i="0">
-                <a:solidFill>
-                  <a:srgbClr val="6B747E"/>
-                </a:solidFill>
-                <a:latin typeface="Segoe UI"/>
-              </a:rPr>
-              <a:t>build del bank per categoria</a:t>
-            </a:r>
-          </a:p>
-        </p:txBody>
-      </p:sp>
-      <p:sp>
-        <p:nvSpPr>
-          <p:cNvPr id="8" name="Rounded Rectangle 7"/>
-          <p:cNvSpPr/>
-          <p:nvPr/>
-        </p:nvSpPr>
-        <p:spPr>
-          <a:xfrm>
-            <a:off x="8119871" y="4709160"/>
-            <a:ext cx="3520440" cy="1143000"/>
-          </a:xfrm>
-          <a:prstGeom prst="roundRect">
-            <a:avLst>
-              <a:gd name="adj" fmla="val 6000"/>
-            </a:avLst>
-          </a:prstGeom>
-          <a:solidFill>
-            <a:srgbClr val="F2F6F9"/>
-          </a:solidFill>
-          <a:ln>
-            <a:noFill/>
-          </a:ln>
-          <a:effectLst/>
-        </p:spPr>
-        <p:style>
-          <a:lnRef idx="1">
-            <a:schemeClr val="accent1"/>
-          </a:lnRef>
-          <a:fillRef idx="3">
-            <a:schemeClr val="accent1"/>
-          </a:fillRef>
-          <a:effectRef idx="2">
-            <a:schemeClr val="accent1"/>
-          </a:effectRef>
-          <a:fontRef idx="minor">
-            <a:schemeClr val="lt1"/>
-          </a:fontRef>
-        </p:style>
-        <p:txBody>
-          <a:bodyPr rtlCol="0" anchor="ctr" wrap="square" lIns="109728" rIns="109728"/>
-          <a:lstStyle/>
-          <a:p>
-            <a:pPr algn="ctr">
-              <a:spcBef>
-                <a:spcPts val="0"/>
-              </a:spcBef>
-              <a:spcAft>
-                <a:spcPts val="200"/>
-              </a:spcAft>
-            </a:pPr>
-            <a:r>
-              <a:rPr sz="3000" b="1" i="0">
-                <a:solidFill>
-                  <a:srgbClr val="2D6A8F"/>
-                </a:solidFill>
-                <a:latin typeface="Segoe UI"/>
-              </a:rPr>
-              <a:t>0.9846</a:t>
-            </a:r>
-          </a:p>
-          <a:p>
-            <a:pPr algn="ctr">
-              <a:spcBef>
-                <a:spcPts val="0"/>
-              </a:spcBef>
-              <a:spcAft>
-                <a:spcPts val="0"/>
-              </a:spcAft>
-            </a:pPr>
-            <a:r>
-              <a:rPr sz="1150" b="0" i="0">
-                <a:solidFill>
-                  <a:srgbClr val="6B747E"/>
-                </a:solidFill>
-                <a:latin typeface="Segoe UI"/>
-              </a:rPr>
-              <a:t>macro AUROC, gia' al target</a:t>
-            </a:r>
-          </a:p>
-        </p:txBody>
-      </p:sp>
-      <p:sp>
-        <p:nvSpPr>
-          <p:cNvPr id="9" name="Rounded Rectangle 8"/>
-          <p:cNvSpPr/>
-          <p:nvPr/>
-        </p:nvSpPr>
-        <p:spPr>
-          <a:xfrm>
-            <a:off x="548640" y="6080760"/>
-            <a:ext cx="11091672" cy="566928"/>
-          </a:xfrm>
-          <a:prstGeom prst="roundRect">
-            <a:avLst>
-              <a:gd name="adj" fmla="val 6000"/>
-            </a:avLst>
-          </a:prstGeom>
-          <a:solidFill>
-            <a:srgbClr val="F2F6F9"/>
-          </a:solidFill>
-          <a:ln>
-            <a:noFill/>
-          </a:ln>
-          <a:effectLst/>
-        </p:spPr>
-        <p:style>
-          <a:lnRef idx="1">
-            <a:schemeClr val="accent1"/>
-          </a:lnRef>
-          <a:fillRef idx="3">
-            <a:schemeClr val="accent1"/>
-          </a:fillRef>
-          <a:effectRef idx="2">
-            <a:schemeClr val="accent1"/>
-          </a:effectRef>
-          <a:fontRef idx="minor">
-            <a:schemeClr val="lt1"/>
-          </a:fontRef>
-        </p:style>
-        <p:txBody>
           <a:bodyPr rtlCol="0" anchor="ctr" wrap="square" lIns="164592" rIns="164592"/>
           <a:lstStyle/>
           <a:p>
@@ -7450,13 +7098,31 @@
               </a:spcAft>
             </a:pPr>
             <a:r>
-              <a:rPr sz="1400" b="1" i="0">
+              <a:rPr sz="1350" b="0" i="0">
+                <a:solidFill>
+                  <a:srgbClr val="1C2128"/>
+                </a:solidFill>
+                <a:latin typeface="Segoe UI"/>
+              </a:rPr>
+              <a:t>Pulito 0.9804. Blur, luminosita' e contrasto costano &lt;1.2 punti anche a severita' massima; </a:t>
+            </a:r>
+            <a:r>
+              <a:rPr sz="1350" b="1" i="0">
                 <a:solidFill>
                   <a:srgbClr val="16324A"/>
                 </a:solidFill>
                 <a:latin typeface="Segoe UI"/>
               </a:rPr>
-              <a:t>Efficienza come scelta progettuale: gli obiettivi alti sono raggiunti senza complessita' aggiuntiva.</a:t>
+              <a:t>solo il rumore additivo erode (-6.4 pt), trainato da zipper e capsule. </a:t>
+            </a:r>
+            <a:r>
+              <a:rPr sz="1350" b="0" i="0">
+                <a:solidFill>
+                  <a:srgbClr val="1C2128"/>
+                </a:solidFill>
+                <a:latin typeface="Segoe UI"/>
+              </a:rPr>
+              <a:t>Robusto allo shift fotometrico; un denoising a monte coprirebbe il resto.</a:t>
             </a:r>
           </a:p>
         </p:txBody>
@@ -7982,6 +7648,591 @@
                 <a:latin typeface="Segoe UI"/>
               </a:rPr>
               <a:t>immagini piccole mono-concetto, score solo pixel, risultati misurati una volta sola.</a:t>
+            </a:r>
+          </a:p>
+        </p:txBody>
+      </p:sp>
+    </p:spTree>
+  </p:cSld>
+  <p:clrMapOvr>
+    <a:masterClrMapping/>
+  </p:clrMapOvr>
+</p:sld>
+</file>
+
+<file path=ppt/slides/slide20.xml><?xml version="1.0" encoding="utf-8"?>
+<p:sld xmlns:a="http://schemas.openxmlformats.org/drawingml/2006/main" xmlns:p="http://schemas.openxmlformats.org/presentationml/2006/main" xmlns:r="http://schemas.openxmlformats.org/officeDocument/2006/relationships">
+  <p:cSld>
+    <p:spTree>
+      <p:nvGrpSpPr>
+        <p:cNvPr id="1" name=""/>
+        <p:cNvGrpSpPr/>
+        <p:nvPr/>
+      </p:nvGrpSpPr>
+      <p:grpSpPr/>
+      <p:sp>
+        <p:nvSpPr>
+          <p:cNvPr id="2" name="Rectangle 1"/>
+          <p:cNvSpPr/>
+          <p:nvPr/>
+        </p:nvSpPr>
+        <p:spPr>
+          <a:xfrm>
+            <a:off x="0" y="0"/>
+            <a:ext cx="12191695" cy="109728"/>
+          </a:xfrm>
+          <a:prstGeom prst="rect">
+            <a:avLst/>
+          </a:prstGeom>
+          <a:solidFill>
+            <a:srgbClr val="1F9D55"/>
+          </a:solidFill>
+          <a:ln>
+            <a:noFill/>
+          </a:ln>
+          <a:effectLst/>
+        </p:spPr>
+        <p:style>
+          <a:lnRef idx="1">
+            <a:schemeClr val="accent1"/>
+          </a:lnRef>
+          <a:fillRef idx="3">
+            <a:schemeClr val="accent1"/>
+          </a:fillRef>
+          <a:effectRef idx="2">
+            <a:schemeClr val="accent1"/>
+          </a:effectRef>
+          <a:fontRef idx="minor">
+            <a:schemeClr val="lt1"/>
+          </a:fontRef>
+        </p:style>
+        <p:txBody>
+          <a:bodyPr rtlCol="0" anchor="ctr"/>
+          <a:lstStyle/>
+          <a:p>
+            <a:pPr algn="ctr"/>
+          </a:p>
+        </p:txBody>
+      </p:sp>
+      <p:sp>
+        <p:nvSpPr>
+          <p:cNvPr id="3" name="TextBox 2"/>
+          <p:cNvSpPr txBox="1"/>
+          <p:nvPr/>
+        </p:nvSpPr>
+        <p:spPr>
+          <a:xfrm>
+            <a:off x="548640" y="310896"/>
+            <a:ext cx="11064240" cy="365760"/>
+          </a:xfrm>
+          <a:prstGeom prst="rect">
+            <a:avLst/>
+          </a:prstGeom>
+          <a:noFill/>
+        </p:spPr>
+        <p:txBody>
+          <a:bodyPr wrap="square">
+            <a:spAutoFit/>
+          </a:bodyPr>
+          <a:lstStyle/>
+          <a:p>
+            <a:pPr algn="l">
+              <a:spcBef>
+                <a:spcPts val="0"/>
+              </a:spcBef>
+              <a:spcAft>
+                <a:spcPts val="600"/>
+              </a:spcAft>
+            </a:pPr>
+            <a:r>
+              <a:rPr sz="1200" b="1" i="0">
+                <a:solidFill>
+                  <a:srgbClr val="6B747E"/>
+                </a:solidFill>
+                <a:latin typeface="Segoe UI"/>
+              </a:rPr>
+              <a:t>SCELTE DI EFFICIENZA</a:t>
+            </a:r>
+          </a:p>
+        </p:txBody>
+      </p:sp>
+      <p:sp>
+        <p:nvSpPr>
+          <p:cNvPr id="4" name="TextBox 3"/>
+          <p:cNvSpPr txBox="1"/>
+          <p:nvPr/>
+        </p:nvSpPr>
+        <p:spPr>
+          <a:xfrm>
+            <a:off x="548640" y="603504"/>
+            <a:ext cx="11064240" cy="822960"/>
+          </a:xfrm>
+          <a:prstGeom prst="rect">
+            <a:avLst/>
+          </a:prstGeom>
+          <a:noFill/>
+        </p:spPr>
+        <p:txBody>
+          <a:bodyPr wrap="square">
+            <a:spAutoFit/>
+          </a:bodyPr>
+          <a:lstStyle/>
+          <a:p>
+            <a:pPr algn="l">
+              <a:spcBef>
+                <a:spcPts val="0"/>
+              </a:spcBef>
+              <a:spcAft>
+                <a:spcPts val="600"/>
+              </a:spcAft>
+            </a:pPr>
+            <a:r>
+              <a:rPr sz="2900" b="1" i="0">
+                <a:solidFill>
+                  <a:srgbClr val="16324A"/>
+                </a:solidFill>
+                <a:latin typeface="Segoe UI"/>
+              </a:rPr>
+              <a:t>Cosa NON abbiamo aggiunto — e perché</a:t>
+            </a:r>
+          </a:p>
+        </p:txBody>
+      </p:sp>
+      <p:sp>
+        <p:nvSpPr>
+          <p:cNvPr id="5" name="TextBox 4"/>
+          <p:cNvSpPr txBox="1"/>
+          <p:nvPr/>
+        </p:nvSpPr>
+        <p:spPr>
+          <a:xfrm>
+            <a:off x="548640" y="1600200"/>
+            <a:ext cx="11091672" cy="2743200"/>
+          </a:xfrm>
+          <a:prstGeom prst="rect">
+            <a:avLst/>
+          </a:prstGeom>
+          <a:noFill/>
+        </p:spPr>
+        <p:txBody>
+          <a:bodyPr wrap="square">
+            <a:spAutoFit/>
+          </a:bodyPr>
+          <a:lstStyle/>
+          <a:p>
+            <a:pPr algn="l">
+              <a:spcBef>
+                <a:spcPts val="0"/>
+              </a:spcBef>
+              <a:spcAft>
+                <a:spcPts val="1200"/>
+              </a:spcAft>
+            </a:pPr>
+            <a:r>
+              <a:rPr sz="1500" b="1" i="0">
+                <a:solidFill>
+                  <a:srgbClr val="1F9D55"/>
+                </a:solidFill>
+                <a:latin typeface="Segoe UI"/>
+              </a:rPr>
+              <a:t>▪  </a:t>
+            </a:r>
+            <a:r>
+              <a:rPr sz="1550" b="1" i="0">
+                <a:solidFill>
+                  <a:srgbClr val="1C2128"/>
+                </a:solidFill>
+                <a:latin typeface="Segoe UI"/>
+              </a:rPr>
+              <a:t>Niente FAISS / ANN: </a:t>
+            </a:r>
+            <a:r>
+              <a:rPr sz="1550" b="0" i="0">
+                <a:solidFill>
+                  <a:srgbClr val="1C2128"/>
+                </a:solidFill>
+                <a:latin typeface="Segoe UI"/>
+              </a:rPr>
+              <a:t>a questa dimensione del bank la ricerca esatta del vicino costa secondi per categoria; un indice approssimato aggiungerebbe una dipendenza e un rischio di accuratezza per zero guadagno</a:t>
+            </a:r>
+          </a:p>
+          <a:p>
+            <a:pPr algn="l">
+              <a:spcBef>
+                <a:spcPts val="0"/>
+              </a:spcBef>
+              <a:spcAft>
+                <a:spcPts val="1200"/>
+              </a:spcAft>
+            </a:pPr>
+            <a:r>
+              <a:rPr sz="1500" b="1" i="0">
+                <a:solidFill>
+                  <a:srgbClr val="1F9D55"/>
+                </a:solidFill>
+                <a:latin typeface="Segoe UI"/>
+              </a:rPr>
+              <a:t>▪  </a:t>
+            </a:r>
+            <a:r>
+              <a:rPr sz="1550" b="1" i="0">
+                <a:solidFill>
+                  <a:srgbClr val="1C2128"/>
+                </a:solidFill>
+                <a:latin typeface="Segoe UI"/>
+              </a:rPr>
+              <a:t>Niente backbone piu' pesante: </a:t>
+            </a:r>
+            <a:r>
+              <a:rPr sz="1550" b="0" i="0">
+                <a:solidFill>
+                  <a:srgbClr val="1C2128"/>
+                </a:solidFill>
+                <a:latin typeface="Segoe UI"/>
+              </a:rPr>
+              <a:t>WideResNet50-2 congelata raggiunge gia' 0.9846 macro; l'intero sistema addestra e serve su una GPU da 4 GB</a:t>
+            </a:r>
+          </a:p>
+          <a:p>
+            <a:pPr algn="l">
+              <a:spcBef>
+                <a:spcPts val="0"/>
+              </a:spcBef>
+              <a:spcAft>
+                <a:spcPts val="1200"/>
+              </a:spcAft>
+            </a:pPr>
+            <a:r>
+              <a:rPr sz="1500" b="1" i="0">
+                <a:solidFill>
+                  <a:srgbClr val="1F9D55"/>
+                </a:solidFill>
+                <a:latin typeface="Segoe UI"/>
+              </a:rPr>
+              <a:t>▪  </a:t>
+            </a:r>
+            <a:r>
+              <a:rPr sz="1550" b="1" i="0">
+                <a:solidFill>
+                  <a:srgbClr val="1C2128"/>
+                </a:solidFill>
+                <a:latin typeface="Segoe UI"/>
+              </a:rPr>
+              <a:t>Ensemble GAN + PatchCore, misurato non assunto: </a:t>
+            </a:r>
+            <a:r>
+              <a:rPr sz="1550" b="0" i="0">
+                <a:solidFill>
+                  <a:srgbClr val="1C2128"/>
+                </a:solidFill>
+                <a:latin typeface="Segoe UI"/>
+              </a:rPr>
+              <a:t>peso di fusione scelto su fold di calibrazione e validato su fold held-out — nessun guadagno materiale sul macro AUROC: il PatchCore da solo domina, quindi spediamo il sistema piu' semplice</a:t>
+            </a:r>
+          </a:p>
+        </p:txBody>
+      </p:sp>
+      <p:sp>
+        <p:nvSpPr>
+          <p:cNvPr id="6" name="Rounded Rectangle 5"/>
+          <p:cNvSpPr/>
+          <p:nvPr/>
+        </p:nvSpPr>
+        <p:spPr>
+          <a:xfrm>
+            <a:off x="548640" y="4709160"/>
+            <a:ext cx="3520440" cy="1143000"/>
+          </a:xfrm>
+          <a:prstGeom prst="roundRect">
+            <a:avLst>
+              <a:gd name="adj" fmla="val 6000"/>
+            </a:avLst>
+          </a:prstGeom>
+          <a:solidFill>
+            <a:srgbClr val="F2F6F9"/>
+          </a:solidFill>
+          <a:ln>
+            <a:noFill/>
+          </a:ln>
+          <a:effectLst/>
+        </p:spPr>
+        <p:style>
+          <a:lnRef idx="1">
+            <a:schemeClr val="accent1"/>
+          </a:lnRef>
+          <a:fillRef idx="3">
+            <a:schemeClr val="accent1"/>
+          </a:fillRef>
+          <a:effectRef idx="2">
+            <a:schemeClr val="accent1"/>
+          </a:effectRef>
+          <a:fontRef idx="minor">
+            <a:schemeClr val="lt1"/>
+          </a:fontRef>
+        </p:style>
+        <p:txBody>
+          <a:bodyPr rtlCol="0" anchor="ctr" wrap="square" lIns="109728" rIns="109728"/>
+          <a:lstStyle/>
+          <a:p>
+            <a:pPr algn="ctr">
+              <a:spcBef>
+                <a:spcPts val="0"/>
+              </a:spcBef>
+              <a:spcAft>
+                <a:spcPts val="200"/>
+              </a:spcAft>
+            </a:pPr>
+            <a:r>
+              <a:rPr sz="3000" b="1" i="0">
+                <a:solidFill>
+                  <a:srgbClr val="1F9D55"/>
+                </a:solidFill>
+                <a:latin typeface="Segoe UI"/>
+              </a:rPr>
+              <a:t>4 GB</a:t>
+            </a:r>
+          </a:p>
+          <a:p>
+            <a:pPr algn="ctr">
+              <a:spcBef>
+                <a:spcPts val="0"/>
+              </a:spcBef>
+              <a:spcAft>
+                <a:spcPts val="0"/>
+              </a:spcAft>
+            </a:pPr>
+            <a:r>
+              <a:rPr sz="1150" b="0" i="0">
+                <a:solidFill>
+                  <a:srgbClr val="6B747E"/>
+                </a:solidFill>
+                <a:latin typeface="Segoe UI"/>
+              </a:rPr>
+              <a:t>tutta l'inferenza su Quadro T1000</a:t>
+            </a:r>
+          </a:p>
+        </p:txBody>
+      </p:sp>
+      <p:sp>
+        <p:nvSpPr>
+          <p:cNvPr id="7" name="Rounded Rectangle 6"/>
+          <p:cNvSpPr/>
+          <p:nvPr/>
+        </p:nvSpPr>
+        <p:spPr>
+          <a:xfrm>
+            <a:off x="4334256" y="4709160"/>
+            <a:ext cx="3520440" cy="1143000"/>
+          </a:xfrm>
+          <a:prstGeom prst="roundRect">
+            <a:avLst>
+              <a:gd name="adj" fmla="val 6000"/>
+            </a:avLst>
+          </a:prstGeom>
+          <a:solidFill>
+            <a:srgbClr val="F2F6F9"/>
+          </a:solidFill>
+          <a:ln>
+            <a:noFill/>
+          </a:ln>
+          <a:effectLst/>
+        </p:spPr>
+        <p:style>
+          <a:lnRef idx="1">
+            <a:schemeClr val="accent1"/>
+          </a:lnRef>
+          <a:fillRef idx="3">
+            <a:schemeClr val="accent1"/>
+          </a:fillRef>
+          <a:effectRef idx="2">
+            <a:schemeClr val="accent1"/>
+          </a:effectRef>
+          <a:fontRef idx="minor">
+            <a:schemeClr val="lt1"/>
+          </a:fontRef>
+        </p:style>
+        <p:txBody>
+          <a:bodyPr rtlCol="0" anchor="ctr" wrap="square" lIns="109728" rIns="109728"/>
+          <a:lstStyle/>
+          <a:p>
+            <a:pPr algn="ctr">
+              <a:spcBef>
+                <a:spcPts val="0"/>
+              </a:spcBef>
+              <a:spcAft>
+                <a:spcPts val="200"/>
+              </a:spcAft>
+            </a:pPr>
+            <a:r>
+              <a:rPr sz="3000" b="1" i="0">
+                <a:solidFill>
+                  <a:srgbClr val="1F9D55"/>
+                </a:solidFill>
+                <a:latin typeface="Segoe UI"/>
+              </a:rPr>
+              <a:t>~6 s</a:t>
+            </a:r>
+          </a:p>
+          <a:p>
+            <a:pPr algn="ctr">
+              <a:spcBef>
+                <a:spcPts val="0"/>
+              </a:spcBef>
+              <a:spcAft>
+                <a:spcPts val="0"/>
+              </a:spcAft>
+            </a:pPr>
+            <a:r>
+              <a:rPr sz="1150" b="0" i="0">
+                <a:solidFill>
+                  <a:srgbClr val="6B747E"/>
+                </a:solidFill>
+                <a:latin typeface="Segoe UI"/>
+              </a:rPr>
+              <a:t>build del bank per categoria</a:t>
+            </a:r>
+          </a:p>
+        </p:txBody>
+      </p:sp>
+      <p:sp>
+        <p:nvSpPr>
+          <p:cNvPr id="8" name="Rounded Rectangle 7"/>
+          <p:cNvSpPr/>
+          <p:nvPr/>
+        </p:nvSpPr>
+        <p:spPr>
+          <a:xfrm>
+            <a:off x="8119871" y="4709160"/>
+            <a:ext cx="3520440" cy="1143000"/>
+          </a:xfrm>
+          <a:prstGeom prst="roundRect">
+            <a:avLst>
+              <a:gd name="adj" fmla="val 6000"/>
+            </a:avLst>
+          </a:prstGeom>
+          <a:solidFill>
+            <a:srgbClr val="F2F6F9"/>
+          </a:solidFill>
+          <a:ln>
+            <a:noFill/>
+          </a:ln>
+          <a:effectLst/>
+        </p:spPr>
+        <p:style>
+          <a:lnRef idx="1">
+            <a:schemeClr val="accent1"/>
+          </a:lnRef>
+          <a:fillRef idx="3">
+            <a:schemeClr val="accent1"/>
+          </a:fillRef>
+          <a:effectRef idx="2">
+            <a:schemeClr val="accent1"/>
+          </a:effectRef>
+          <a:fontRef idx="minor">
+            <a:schemeClr val="lt1"/>
+          </a:fontRef>
+        </p:style>
+        <p:txBody>
+          <a:bodyPr rtlCol="0" anchor="ctr" wrap="square" lIns="109728" rIns="109728"/>
+          <a:lstStyle/>
+          <a:p>
+            <a:pPr algn="ctr">
+              <a:spcBef>
+                <a:spcPts val="0"/>
+              </a:spcBef>
+              <a:spcAft>
+                <a:spcPts val="200"/>
+              </a:spcAft>
+            </a:pPr>
+            <a:r>
+              <a:rPr sz="3000" b="1" i="0">
+                <a:solidFill>
+                  <a:srgbClr val="2D6A8F"/>
+                </a:solidFill>
+                <a:latin typeface="Segoe UI"/>
+              </a:rPr>
+              <a:t>0.9846</a:t>
+            </a:r>
+          </a:p>
+          <a:p>
+            <a:pPr algn="ctr">
+              <a:spcBef>
+                <a:spcPts val="0"/>
+              </a:spcBef>
+              <a:spcAft>
+                <a:spcPts val="0"/>
+              </a:spcAft>
+            </a:pPr>
+            <a:r>
+              <a:rPr sz="1150" b="0" i="0">
+                <a:solidFill>
+                  <a:srgbClr val="6B747E"/>
+                </a:solidFill>
+                <a:latin typeface="Segoe UI"/>
+              </a:rPr>
+              <a:t>macro AUROC, gia' al target</a:t>
+            </a:r>
+          </a:p>
+        </p:txBody>
+      </p:sp>
+      <p:sp>
+        <p:nvSpPr>
+          <p:cNvPr id="9" name="Rounded Rectangle 8"/>
+          <p:cNvSpPr/>
+          <p:nvPr/>
+        </p:nvSpPr>
+        <p:spPr>
+          <a:xfrm>
+            <a:off x="548640" y="6080760"/>
+            <a:ext cx="11091672" cy="566928"/>
+          </a:xfrm>
+          <a:prstGeom prst="roundRect">
+            <a:avLst>
+              <a:gd name="adj" fmla="val 6000"/>
+            </a:avLst>
+          </a:prstGeom>
+          <a:solidFill>
+            <a:srgbClr val="F2F6F9"/>
+          </a:solidFill>
+          <a:ln>
+            <a:noFill/>
+          </a:ln>
+          <a:effectLst/>
+        </p:spPr>
+        <p:style>
+          <a:lnRef idx="1">
+            <a:schemeClr val="accent1"/>
+          </a:lnRef>
+          <a:fillRef idx="3">
+            <a:schemeClr val="accent1"/>
+          </a:fillRef>
+          <a:effectRef idx="2">
+            <a:schemeClr val="accent1"/>
+          </a:effectRef>
+          <a:fontRef idx="minor">
+            <a:schemeClr val="lt1"/>
+          </a:fontRef>
+        </p:style>
+        <p:txBody>
+          <a:bodyPr rtlCol="0" anchor="ctr" wrap="square" lIns="164592" rIns="164592"/>
+          <a:lstStyle/>
+          <a:p>
+            <a:pPr algn="l">
+              <a:spcBef>
+                <a:spcPts val="0"/>
+              </a:spcBef>
+              <a:spcAft>
+                <a:spcPts val="0"/>
+              </a:spcAft>
+            </a:pPr>
+            <a:r>
+              <a:rPr sz="1400" b="1" i="0">
+                <a:solidFill>
+                  <a:srgbClr val="16324A"/>
+                </a:solidFill>
+                <a:latin typeface="Segoe UI"/>
+              </a:rPr>
+              <a:t>Efficienza come scelta progettuale: gli obiettivi alti sono raggiunti senza complessita' aggiuntiva.</a:t>
             </a:r>
           </a:p>
         </p:txBody>
